--- a/test/generator/baseline/gen.tex.to.pptx.pptx
+++ b/test/generator/baseline/gen.tex.to.pptx.pptx
@@ -1743,8 +1743,8 @@
             <a:tbl>
               <a:tblPr firstRow="1"/>
               <a:tblGrid>
-                <a:gridCol w="2244436"/>
-                <a:gridCol w="5985164"/>
+                <a:gridCol w="2554014"/>
+                <a:gridCol w="5675586"/>
               </a:tblGrid>
               <a:tr h="3683000">
                 <a:tc>
@@ -1757,16 +1757,15 @@
                       </a:pPr>
                       <a:r>
                         <a:rPr lang="en-US" sz="1200" dirty="0"/>
-                        <a:t>One</a:t>
+                        <a:t>One
+Three	Two</a:t>
                       </a:r>
-                      <a:r>
-                        <a:rPr lang="en-US" sz="1200" dirty="0"/>
-                        <a:t>Three</a:t>
-                      </a:r>
-                      <a:r>
-                        <a:rPr lang="en-US" sz="1200" dirty="0"/>
-                        <a:t>Two</a:t>
-                      </a:r>
+                      <a:endParaRPr lang="en-US" sz="1200" dirty="0"/>
+                    </a:p>
+                    <a:p>
+                      <a:pPr>
+                        <a:buNone/>
+                      </a:pPr>
                       <a:r>
                         <a:rPr lang="en-US" sz="1200" dirty="0"/>
                         <a:t>Four</a:t>

--- a/test/generator/baseline/gen.tex.to.pptx.pptx
+++ b/test/generator/baseline/gen.tex.to.pptx.pptx
@@ -10372,9 +10372,12 @@
           <a:lstStyle/>
           <a:p>
             <a:pPr marL="228600" indent="-177800">
-              <a:buFont typeface="+mj-lt"/>
-              <a:buAutoNum type="arabicPeriod"/>
+              <a:buNone/>
             </a:pPr>
+            <a:r>
+              <a:rPr lang="en-US" sz="1800" dirty="0"/>
+              <a:t>1.	</a:t>
+            </a:r>
             <a:r>
               <a:rPr lang="en-US" sz="1800" dirty="0"/>
               <a:t>One, with a very long line to demonstrate that the hanging indent for the list is working correctly</a:t>
@@ -10383,9 +10386,12 @@
           </a:p>
           <a:p>
             <a:pPr marL="228600" indent="-177800">
-              <a:buFont typeface="+mj-lt"/>
-              <a:buAutoNum type="arabicPeriod"/>
+              <a:buNone/>
             </a:pPr>
+            <a:r>
+              <a:rPr lang="en-US" sz="1800" dirty="0"/>
+              <a:t>2.	</a:t>
+            </a:r>
             <a:r>
               <a:rPr lang="en-US" sz="1800" dirty="0"/>
               <a:t>Two</a:t>
@@ -10485,9 +10491,12 @@
           <a:lstStyle/>
           <a:p>
             <a:pPr marL="228600" indent="-177800">
-              <a:buFont typeface="+mj-lt"/>
-              <a:buAutoNum type="arabicPeriod"/>
+              <a:buNone/>
             </a:pPr>
+            <a:r>
+              <a:rPr lang="en-US" sz="1800" dirty="0"/>
+              <a:t>1.	</a:t>
+            </a:r>
             <a:r>
               <a:rPr lang="en-US" sz="1800" dirty="0"/>
               <a:t>One</a:t>
@@ -10496,9 +10505,12 @@
           </a:p>
           <a:p>
             <a:pPr marL="457200" indent="-177800" lvl="1">
-              <a:buFont typeface="+mj-lt"/>
-              <a:buAutoNum type="arabicPeriod"/>
+              <a:buNone/>
             </a:pPr>
+            <a:r>
+              <a:rPr lang="en-US" sz="1800" dirty="0"/>
+              <a:t>1.	</a:t>
+            </a:r>
             <a:r>
               <a:rPr lang="en-US" sz="1800" dirty="0"/>
               <a:t>Two</a:t>
@@ -10507,9 +10519,12 @@
           </a:p>
           <a:p>
             <a:pPr marL="685800" indent="-177800" lvl="2">
-              <a:buFont typeface="+mj-lt"/>
-              <a:buAutoNum type="arabicPeriod"/>
+              <a:buNone/>
             </a:pPr>
+            <a:r>
+              <a:rPr lang="en-US" sz="1800" dirty="0"/>
+              <a:t>1.	</a:t>
+            </a:r>
             <a:r>
               <a:rPr lang="en-US" sz="1800" dirty="0"/>
               <a:t>Three</a:t>
@@ -10518,9 +10533,12 @@
           </a:p>
           <a:p>
             <a:pPr marL="685800" indent="-177800" lvl="2">
-              <a:buFont typeface="+mj-lt"/>
-              <a:buAutoNum type="arabicPeriod"/>
+              <a:buNone/>
             </a:pPr>
+            <a:r>
+              <a:rPr lang="en-US" sz="1800" dirty="0"/>
+              <a:t>2.	</a:t>
+            </a:r>
             <a:r>
               <a:rPr lang="en-US" sz="1800" dirty="0"/>
               <a:t>Four with a very long line to demonstrate that the hanging indent for the list is working correctly.</a:t>
@@ -10529,9 +10547,12 @@
           </a:p>
           <a:p>
             <a:pPr marL="685800" indent="-177800" lvl="2">
-              <a:buFont typeface="+mj-lt"/>
-              <a:buAutoNum type="arabicPeriod"/>
+              <a:buNone/>
             </a:pPr>
+            <a:r>
+              <a:rPr lang="en-US" sz="1800" dirty="0"/>
+              <a:t>3.	</a:t>
+            </a:r>
             <a:r>
               <a:rPr lang="en-US" sz="1800" dirty="0"/>
               <a:t>Five</a:t>
@@ -10540,9 +10561,12 @@
           </a:p>
           <a:p>
             <a:pPr marL="228600" indent="-177800">
-              <a:buFont typeface="+mj-lt"/>
-              <a:buAutoNum type="arabicPeriod"/>
+              <a:buNone/>
             </a:pPr>
+            <a:r>
+              <a:rPr lang="en-US" sz="1800" dirty="0"/>
+              <a:t>2.	</a:t>
+            </a:r>
             <a:r>
               <a:rPr lang="en-US" sz="1800" dirty="0"/>
               <a:t>Six</a:t>
@@ -11051,9 +11075,12 @@
           <a:lstStyle/>
           <a:p>
             <a:pPr marL="228600" indent="-177800">
-              <a:buFont typeface="+mj-lt"/>
-              <a:buAutoNum type="arabicPeriod"/>
+              <a:buNone/>
             </a:pPr>
+            <a:r>
+              <a:rPr lang="en-US" sz="1800" dirty="0"/>
+              <a:t>1.	</a:t>
+            </a:r>
             <a:r>
               <a:rPr lang="en-US" sz="1800" dirty="0"/>
               <a:t>One</a:t>
@@ -11062,9 +11089,12 @@
           </a:p>
           <a:p>
             <a:pPr marL="228600" indent="-177800">
-              <a:buFont typeface="+mj-lt"/>
-              <a:buAutoNum type="arabicPeriod"/>
+              <a:buNone/>
             </a:pPr>
+            <a:r>
+              <a:rPr lang="en-US" sz="1800" dirty="0"/>
+              <a:t>2.	</a:t>
+            </a:r>
             <a:r>
               <a:rPr lang="en-US" sz="1800" dirty="0"/>
               <a:t>Two</a:t>
@@ -11083,9 +11113,12 @@
           </a:p>
           <a:p>
             <a:pPr marL="228600" indent="-177800">
-              <a:buFont typeface="+mj-lt"/>
-              <a:buAutoNum type="arabicPeriod"/>
+              <a:buNone/>
             </a:pPr>
+            <a:r>
+              <a:rPr lang="en-US" sz="1800" dirty="0"/>
+              <a:t>3.	</a:t>
+            </a:r>
             <a:r>
               <a:rPr lang="en-US" sz="1800" dirty="0"/>
               <a:t>We now resume our normal programming</a:t>
@@ -11094,9 +11127,12 @@
           </a:p>
           <a:p>
             <a:pPr marL="228600" indent="-177800">
-              <a:buFont typeface="+mj-lt"/>
-              <a:buAutoNum type="arabicPeriod"/>
+              <a:buNone/>
             </a:pPr>
+            <a:r>
+              <a:rPr lang="en-US" sz="1800" dirty="0"/>
+              <a:t>4.	</a:t>
+            </a:r>
             <a:r>
               <a:rPr lang="en-US" sz="1800" dirty="0"/>
               <a:t>Four</a:t>

--- a/test/generator/baseline/gen.tex.to.pptx.pptx
+++ b/test/generator/baseline/gen.tex.to.pptx.pptx
@@ -11232,7 +11232,11 @@
             </a:pPr>
             <a:r>
               <a:rPr lang="en-US" sz="1400" dirty="0"/>
-              <a:t>1. In paged media, footnotes are usually displayed at the bottom of the text. However, in ebooks, a better paradigm is to make them clickable endnotes that the user can browse at her pleasure. This conversion is handled automatically by calibre.</a:t>
+              <a:t>1. </a:t>
+            </a:r>
+            <a:r>
+              <a:rPr lang="en-US" sz="1400" dirty="0"/>
+              <a:t>In paged media, footnotes are usually displayed at the bottom of the text. However, in ebooks, a better paradigm is to make them clickable endnotes that the user can browse at her pleasure. This conversion is handled automatically by calibre.</a:t>
             </a:r>
             <a:endParaRPr lang="en-US" sz="1400" dirty="0"/>
           </a:p>
@@ -11242,7 +11246,11 @@
             </a:pPr>
             <a:r>
               <a:rPr lang="en-US" sz="1400" dirty="0"/>
-              <a:t>2. Endnotes are typically used for longer notes, they remain endnotes when converted into ebook form, except that they have an additional backlink to make it easy to return to the current position after reading the note.</a:t>
+              <a:t>2. </a:t>
+            </a:r>
+            <a:r>
+              <a:rPr lang="en-US" sz="1400" dirty="0"/>
+              <a:t>Endnotes are typically used for longer notes, they remain endnotes when converted into ebook form, except that they have an additional backlink to make it easy to return to the current position after reading the note.</a:t>
             </a:r>
             <a:endParaRPr lang="en-US" sz="1400" dirty="0"/>
           </a:p>
